--- a/2026_Б_ПІ_ПЗПІ-22-1_Петренко_М_О.pptx
+++ b/2026_Б_ПІ_ПЗПІ-22-1_Петренко_М_О.pptx
@@ -8310,7 +8310,7 @@
               <a:buNone/>
             </a:pPr>
             <a:r>
-              <a:rPr lang="uk" sz="1800" dirty="0" smtClean="0">
+              <a:rPr lang="uk" sz="1800" smtClean="0">
                 <a:solidFill>
                   <a:schemeClr val="tx1"/>
                 </a:solidFill>
@@ -8318,12 +8318,20 @@
               <a:t>10 </a:t>
             </a:r>
             <a:r>
-              <a:rPr lang="uk" sz="1800" dirty="0">
+              <a:rPr lang="uk" sz="1800" smtClean="0">
                 <a:solidFill>
                   <a:schemeClr val="tx1"/>
                 </a:solidFill>
               </a:rPr>
-              <a:t>червня </a:t>
+              <a:t>липня</a:t>
+            </a:r>
+            <a:r>
+              <a:rPr lang="uk" sz="1800" smtClean="0">
+                <a:solidFill>
+                  <a:schemeClr val="tx1"/>
+                </a:solidFill>
+              </a:rPr>
+              <a:t> </a:t>
             </a:r>
             <a:r>
               <a:rPr lang="uk" sz="1800" dirty="0" smtClean="0">

--- a/2026_Б_ПІ_ПЗПІ-22-1_Петренко_М_О.pptx
+++ b/2026_Б_ПІ_ПЗПІ-22-1_Петренко_М_О.pptx
@@ -30,14 +30,14 @@
   <p:notesSz cx="6858000" cy="9144000"/>
   <p:embeddedFontLst>
     <p:embeddedFont>
-      <p:font typeface="Economica" panose="020B0604020202020204" charset="0"/>
+      <p:font typeface="Open Sans" panose="020B0604020202020204" charset="0"/>
       <p:regular r:id="rId20"/>
       <p:bold r:id="rId21"/>
       <p:italic r:id="rId22"/>
       <p:boldItalic r:id="rId23"/>
     </p:embeddedFont>
     <p:embeddedFont>
-      <p:font typeface="Open Sans" panose="020B0604020202020204" charset="0"/>
+      <p:font typeface="Economica" panose="020B0604020202020204" charset="0"/>
       <p:regular r:id="rId24"/>
       <p:bold r:id="rId25"/>
       <p:italic r:id="rId26"/>
@@ -8315,23 +8315,7 @@
                   <a:schemeClr val="tx1"/>
                 </a:solidFill>
               </a:rPr>
-              <a:t>10 </a:t>
-            </a:r>
-            <a:r>
-              <a:rPr lang="uk" sz="1800" smtClean="0">
-                <a:solidFill>
-                  <a:schemeClr val="tx1"/>
-                </a:solidFill>
-              </a:rPr>
-              <a:t>липня</a:t>
-            </a:r>
-            <a:r>
-              <a:rPr lang="uk" sz="1800" smtClean="0">
-                <a:solidFill>
-                  <a:schemeClr val="tx1"/>
-                </a:solidFill>
-              </a:rPr>
-              <a:t> </a:t>
+              <a:t>10 липня </a:t>
             </a:r>
             <a:r>
               <a:rPr lang="uk" sz="1800" dirty="0" smtClean="0">
@@ -10484,16 +10468,61 @@
           </p:cNvPicPr>
           <p:nvPr/>
         </p:nvPicPr>
-        <p:blipFill>
+        <p:blipFill rotWithShape="1">
           <a:blip r:embed="rId4"/>
-          <a:stretch>
-            <a:fillRect/>
-          </a:stretch>
+          <a:srcRect b="72156"/>
+          <a:stretch/>
         </p:blipFill>
         <p:spPr>
           <a:xfrm>
             <a:off x="1737360" y="1347063"/>
-            <a:ext cx="5776630" cy="3232162"/>
+            <a:ext cx="5776630" cy="899951"/>
+          </a:xfrm>
+          <a:prstGeom prst="rect">
+            <a:avLst/>
+          </a:prstGeom>
+        </p:spPr>
+      </p:pic>
+      <p:pic>
+        <p:nvPicPr>
+          <p:cNvPr id="3" name="Рисунок 2"/>
+          <p:cNvPicPr>
+            <a:picLocks noChangeAspect="1"/>
+          </p:cNvPicPr>
+          <p:nvPr/>
+        </p:nvPicPr>
+        <p:blipFill rotWithShape="1">
+          <a:blip r:embed="rId5"/>
+          <a:srcRect t="25180" r="77386" b="65606"/>
+          <a:stretch/>
+        </p:blipFill>
+        <p:spPr>
+          <a:xfrm>
+            <a:off x="7471260" y="1887802"/>
+            <a:ext cx="1306980" cy="297712"/>
+          </a:xfrm>
+          <a:prstGeom prst="rect">
+            <a:avLst/>
+          </a:prstGeom>
+        </p:spPr>
+      </p:pic>
+      <p:pic>
+        <p:nvPicPr>
+          <p:cNvPr id="4" name="Рисунок 3"/>
+          <p:cNvPicPr>
+            <a:picLocks noChangeAspect="1"/>
+          </p:cNvPicPr>
+          <p:nvPr/>
+        </p:nvPicPr>
+        <p:blipFill rotWithShape="1">
+          <a:blip r:embed="rId5"/>
+          <a:srcRect t="36001"/>
+          <a:stretch/>
+        </p:blipFill>
+        <p:spPr>
+          <a:xfrm>
+            <a:off x="1734481" y="2226848"/>
+            <a:ext cx="5779509" cy="2067907"/>
           </a:xfrm>
           <a:prstGeom prst="rect">
             <a:avLst/>
@@ -11532,7 +11561,15 @@
             </a:pPr>
             <a:r>
               <a:rPr lang="uk-UA" dirty="0" smtClean="0"/>
-              <a:t>Мета даної кваліфікаційної роботи реалізувати: </a:t>
+              <a:t>Мета </a:t>
+            </a:r>
+            <a:r>
+              <a:rPr lang="uk-UA" b="1" dirty="0" smtClean="0"/>
+              <a:t>даної</a:t>
+            </a:r>
+            <a:r>
+              <a:rPr lang="uk-UA" dirty="0" smtClean="0"/>
+              <a:t> кваліфікаційної роботи реалізувати: </a:t>
             </a:r>
             <a:endParaRPr dirty="0">
               <a:latin typeface="Economica" panose="020B0604020202020204" charset="0"/>
@@ -11645,11 +11682,34 @@
                   <a:srgbClr val="000000"/>
                 </a:solidFill>
               </a:rPr>
-              <a:t>сповіщень про нові повідомлення в чаті.</a:t>
-            </a:r>
+              <a:t>сповіщень про нові повідомлення в чаті</a:t>
+            </a:r>
+            <a:r>
+              <a:rPr lang="uk-UA" dirty="0" smtClean="0">
+                <a:solidFill>
+                  <a:srgbClr val="000000"/>
+                </a:solidFill>
+              </a:rPr>
+              <a:t>.</a:t>
+            </a:r>
+            <a:endParaRPr lang="en-US" dirty="0" smtClean="0">
+              <a:solidFill>
+                <a:srgbClr val="000000"/>
+              </a:solidFill>
+            </a:endParaRPr>
           </a:p>
           <a:p>
             <a:pPr marL="0" indent="0">
+              <a:buNone/>
+            </a:pPr>
+            <a:endParaRPr lang="en-US" dirty="0" smtClean="0">
+              <a:solidFill>
+                <a:srgbClr val="000000"/>
+              </a:solidFill>
+            </a:endParaRPr>
+          </a:p>
+          <a:p>
+            <a:pPr marL="0" indent="0">
               <a:spcBef>
                 <a:spcPts val="1200"/>
               </a:spcBef>
@@ -11659,12 +11719,12 @@
               <a:buNone/>
             </a:pPr>
             <a:r>
-              <a:rPr lang="uk-UA" dirty="0">
+              <a:rPr lang="uk-UA" dirty="0" smtClean="0">
                 <a:solidFill>
                   <a:srgbClr val="000000"/>
                 </a:solidFill>
               </a:rPr>
-              <a:t>Ц</a:t>
+              <a:t>Ці </a:t>
             </a:r>
             <a:r>
               <a:rPr lang="uk-UA" dirty="0" smtClean="0">
@@ -11672,7 +11732,23 @@
                   <a:srgbClr val="000000"/>
                 </a:solidFill>
               </a:rPr>
-              <a:t>і елементи є частинами комплексної програмної системи «</a:t>
+              <a:t>елементи є частинами </a:t>
+            </a:r>
+            <a:r>
+              <a:rPr lang="uk-UA" i="1" dirty="0" smtClean="0">
+                <a:solidFill>
+                  <a:srgbClr val="000000"/>
+                </a:solidFill>
+              </a:rPr>
+              <a:t>комплексної</a:t>
+            </a:r>
+            <a:r>
+              <a:rPr lang="uk-UA" dirty="0" smtClean="0">
+                <a:solidFill>
+                  <a:srgbClr val="000000"/>
+                </a:solidFill>
+              </a:rPr>
+              <a:t> програмної системи «</a:t>
             </a:r>
             <a:r>
               <a:rPr lang="en-US" dirty="0" err="1" smtClean="0">
@@ -12445,14 +12521,14 @@
           </a:bodyPr>
           <a:lstStyle/>
           <a:p>
-            <a:pPr marL="0" lvl="0" indent="0" algn="just">
+            <a:pPr marL="0" indent="0" algn="just">
               <a:spcBef>
                 <a:spcPts val="1500"/>
               </a:spcBef>
               <a:buNone/>
             </a:pPr>
             <a:r>
-              <a:rPr lang="ru-RU" dirty="0" err="1" smtClean="0">
+              <a:rPr lang="uk-UA" dirty="0">
                 <a:solidFill>
                   <a:srgbClr val="0D0D0D"/>
                 </a:solidFill>
@@ -12460,10 +12536,10 @@
                   <a:srgbClr val="FFFFFF"/>
                 </a:highlight>
               </a:rPr>
-              <a:t>Реалізація</a:t>
-            </a:r>
-            <a:r>
-              <a:rPr lang="ru-RU" dirty="0" smtClean="0">
+              <a:t>Завданням </a:t>
+            </a:r>
+            <a:r>
+              <a:rPr lang="uk-UA" b="1" dirty="0">
                 <a:solidFill>
                   <a:srgbClr val="0D0D0D"/>
                 </a:solidFill>
@@ -12471,10 +12547,10 @@
                   <a:srgbClr val="FFFFFF"/>
                 </a:highlight>
               </a:rPr>
-              <a:t> </a:t>
-            </a:r>
-            <a:r>
-              <a:rPr lang="ru-RU" dirty="0" err="1" smtClean="0">
+              <a:t>даної</a:t>
+            </a:r>
+            <a:r>
+              <a:rPr lang="uk-UA" dirty="0">
                 <a:solidFill>
                   <a:srgbClr val="0D0D0D"/>
                 </a:solidFill>
@@ -12482,10 +12558,10 @@
                   <a:srgbClr val="FFFFFF"/>
                 </a:highlight>
               </a:rPr>
-              <a:t>системи</a:t>
-            </a:r>
-            <a:r>
-              <a:rPr lang="ru-RU" dirty="0" smtClean="0">
+              <a:t> роботи є створення </a:t>
+            </a:r>
+            <a:r>
+              <a:rPr lang="en-US" dirty="0">
                 <a:solidFill>
                   <a:srgbClr val="0D0D0D"/>
                 </a:solidFill>
@@ -12493,10 +12569,10 @@
                   <a:srgbClr val="FFFFFF"/>
                 </a:highlight>
               </a:rPr>
-              <a:t> </a:t>
-            </a:r>
-            <a:r>
-              <a:rPr lang="ru-RU" dirty="0" err="1">
+              <a:t>front-end </a:t>
+            </a:r>
+            <a:r>
+              <a:rPr lang="uk-UA" dirty="0">
                 <a:solidFill>
                   <a:srgbClr val="0D0D0D"/>
                 </a:solidFill>
@@ -12504,10 +12580,10 @@
                   <a:srgbClr val="FFFFFF"/>
                 </a:highlight>
               </a:rPr>
-              <a:t>передбачає</a:t>
-            </a:r>
-            <a:r>
-              <a:rPr lang="ru-RU" dirty="0">
+              <a:t>частини </a:t>
+            </a:r>
+            <a:r>
+              <a:rPr lang="uk-UA" dirty="0" err="1">
                 <a:solidFill>
                   <a:srgbClr val="0D0D0D"/>
                 </a:solidFill>
@@ -12515,10 +12591,10 @@
                   <a:srgbClr val="FFFFFF"/>
                 </a:highlight>
               </a:rPr>
-              <a:t> </a:t>
-            </a:r>
-            <a:r>
-              <a:rPr lang="ru-RU" dirty="0" err="1">
+              <a:t>вебсайту</a:t>
+            </a:r>
+            <a:r>
+              <a:rPr lang="uk-UA" dirty="0">
                 <a:solidFill>
                   <a:srgbClr val="0D0D0D"/>
                 </a:solidFill>
@@ -12526,10 +12602,10 @@
                   <a:srgbClr val="FFFFFF"/>
                 </a:highlight>
               </a:rPr>
-              <a:t>створення</a:t>
-            </a:r>
-            <a:r>
-              <a:rPr lang="ru-RU" dirty="0">
+              <a:t> та функціоналу чату для мобільного застосунку під ОС </a:t>
+            </a:r>
+            <a:r>
+              <a:rPr lang="en-US" dirty="0">
                 <a:solidFill>
                   <a:srgbClr val="0D0D0D"/>
                 </a:solidFill>
@@ -12537,185 +12613,9 @@
                   <a:srgbClr val="FFFFFF"/>
                 </a:highlight>
               </a:rPr>
-              <a:t> </a:t>
-            </a:r>
-            <a:r>
-              <a:rPr lang="ru-RU" dirty="0" err="1">
-                <a:solidFill>
-                  <a:srgbClr val="0D0D0D"/>
-                </a:solidFill>
-                <a:highlight>
-                  <a:srgbClr val="FFFFFF"/>
-                </a:highlight>
-              </a:rPr>
-              <a:t>бази</a:t>
-            </a:r>
-            <a:r>
-              <a:rPr lang="ru-RU" dirty="0">
-                <a:solidFill>
-                  <a:srgbClr val="0D0D0D"/>
-                </a:solidFill>
-                <a:highlight>
-                  <a:srgbClr val="FFFFFF"/>
-                </a:highlight>
-              </a:rPr>
-              <a:t> </a:t>
-            </a:r>
-            <a:r>
-              <a:rPr lang="ru-RU" dirty="0" err="1">
-                <a:solidFill>
-                  <a:srgbClr val="0D0D0D"/>
-                </a:solidFill>
-                <a:highlight>
-                  <a:srgbClr val="FFFFFF"/>
-                </a:highlight>
-              </a:rPr>
-              <a:t>даних</a:t>
-            </a:r>
-            <a:r>
-              <a:rPr lang="ru-RU" dirty="0">
-                <a:solidFill>
-                  <a:srgbClr val="0D0D0D"/>
-                </a:solidFill>
-                <a:highlight>
-                  <a:srgbClr val="FFFFFF"/>
-                </a:highlight>
-              </a:rPr>
-              <a:t>, </a:t>
-            </a:r>
-            <a:r>
-              <a:rPr lang="ru-RU" dirty="0" err="1">
-                <a:solidFill>
-                  <a:srgbClr val="0D0D0D"/>
-                </a:solidFill>
-                <a:highlight>
-                  <a:srgbClr val="FFFFFF"/>
-                </a:highlight>
-              </a:rPr>
-              <a:t>серверної</a:t>
-            </a:r>
-            <a:r>
-              <a:rPr lang="ru-RU" dirty="0">
-                <a:solidFill>
-                  <a:srgbClr val="0D0D0D"/>
-                </a:solidFill>
-                <a:highlight>
-                  <a:srgbClr val="FFFFFF"/>
-                </a:highlight>
-              </a:rPr>
-              <a:t> </a:t>
-            </a:r>
-            <a:r>
-              <a:rPr lang="ru-RU" dirty="0" err="1" smtClean="0">
-                <a:solidFill>
-                  <a:srgbClr val="0D0D0D"/>
-                </a:solidFill>
-                <a:highlight>
-                  <a:srgbClr val="FFFFFF"/>
-                </a:highlight>
-              </a:rPr>
-              <a:t>частини</a:t>
-            </a:r>
-            <a:r>
-              <a:rPr lang="ru-RU" dirty="0" smtClean="0">
-                <a:solidFill>
-                  <a:srgbClr val="0D0D0D"/>
-                </a:solidFill>
-                <a:highlight>
-                  <a:srgbClr val="FFFFFF"/>
-                </a:highlight>
-              </a:rPr>
-              <a:t> та </a:t>
-            </a:r>
-            <a:r>
-              <a:rPr lang="ru-RU" dirty="0" err="1" smtClean="0">
-                <a:solidFill>
-                  <a:srgbClr val="0D0D0D"/>
-                </a:solidFill>
-                <a:highlight>
-                  <a:srgbClr val="FFFFFF"/>
-                </a:highlight>
-              </a:rPr>
-              <a:t>вебінтерфейсу</a:t>
-            </a:r>
-            <a:r>
-              <a:rPr lang="ru-RU" dirty="0">
-                <a:solidFill>
-                  <a:srgbClr val="0D0D0D"/>
-                </a:solidFill>
-                <a:highlight>
-                  <a:srgbClr val="FFFFFF"/>
-                </a:highlight>
-              </a:rPr>
-              <a:t>, а </a:t>
-            </a:r>
-            <a:r>
-              <a:rPr lang="ru-RU" dirty="0" err="1">
-                <a:solidFill>
-                  <a:srgbClr val="0D0D0D"/>
-                </a:solidFill>
-                <a:highlight>
-                  <a:srgbClr val="FFFFFF"/>
-                </a:highlight>
-              </a:rPr>
-              <a:t>також</a:t>
-            </a:r>
-            <a:r>
-              <a:rPr lang="ru-RU" dirty="0">
-                <a:solidFill>
-                  <a:srgbClr val="0D0D0D"/>
-                </a:solidFill>
-                <a:highlight>
-                  <a:srgbClr val="FFFFFF"/>
-                </a:highlight>
-              </a:rPr>
-              <a:t> </a:t>
-            </a:r>
-            <a:r>
-              <a:rPr lang="ru-RU" dirty="0" err="1">
-                <a:solidFill>
-                  <a:srgbClr val="0D0D0D"/>
-                </a:solidFill>
-                <a:highlight>
-                  <a:srgbClr val="FFFFFF"/>
-                </a:highlight>
-              </a:rPr>
-              <a:t>мобільного</a:t>
-            </a:r>
-            <a:r>
-              <a:rPr lang="ru-RU" dirty="0">
-                <a:solidFill>
-                  <a:srgbClr val="0D0D0D"/>
-                </a:solidFill>
-                <a:highlight>
-                  <a:srgbClr val="FFFFFF"/>
-                </a:highlight>
-              </a:rPr>
-              <a:t> </a:t>
-            </a:r>
-            <a:r>
-              <a:rPr lang="ru-RU" dirty="0" err="1">
-                <a:solidFill>
-                  <a:srgbClr val="0D0D0D"/>
-                </a:solidFill>
-                <a:highlight>
-                  <a:srgbClr val="FFFFFF"/>
-                </a:highlight>
-              </a:rPr>
-              <a:t>клієнту</a:t>
-            </a:r>
-            <a:r>
-              <a:rPr lang="ru-RU" dirty="0">
-                <a:solidFill>
-                  <a:srgbClr val="0D0D0D"/>
-                </a:solidFill>
-                <a:highlight>
-                  <a:srgbClr val="FFFFFF"/>
-                </a:highlight>
-              </a:rPr>
-              <a:t>. </a:t>
-            </a:r>
-            <a:endParaRPr lang="ru-RU" dirty="0" smtClean="0">
+              <a:t>Android.</a:t>
+            </a:r>
+            <a:endParaRPr lang="uk-UA" dirty="0">
               <a:solidFill>
                 <a:srgbClr val="0D0D0D"/>
               </a:solidFill>
@@ -12731,606 +12631,7 @@
               </a:spcBef>
               <a:buNone/>
             </a:pPr>
-            <a:r>
-              <a:rPr lang="ru-RU" dirty="0" smtClean="0">
-                <a:solidFill>
-                  <a:srgbClr val="0D0D0D"/>
-                </a:solidFill>
-                <a:highlight>
-                  <a:srgbClr val="FFFFFF"/>
-                </a:highlight>
-              </a:rPr>
-              <a:t>Вебсайт – </a:t>
-            </a:r>
-            <a:r>
-              <a:rPr lang="ru-RU" dirty="0" err="1" smtClean="0">
-                <a:solidFill>
-                  <a:srgbClr val="0D0D0D"/>
-                </a:solidFill>
-                <a:highlight>
-                  <a:srgbClr val="FFFFFF"/>
-                </a:highlight>
-              </a:rPr>
-              <a:t>основний</a:t>
-            </a:r>
-            <a:r>
-              <a:rPr lang="ru-RU" dirty="0" smtClean="0">
-                <a:solidFill>
-                  <a:srgbClr val="0D0D0D"/>
-                </a:solidFill>
-                <a:highlight>
-                  <a:srgbClr val="FFFFFF"/>
-                </a:highlight>
-              </a:rPr>
-              <a:t> </a:t>
-            </a:r>
-            <a:r>
-              <a:rPr lang="ru-RU" dirty="0" err="1" smtClean="0">
-                <a:solidFill>
-                  <a:srgbClr val="0D0D0D"/>
-                </a:solidFill>
-                <a:highlight>
-                  <a:srgbClr val="FFFFFF"/>
-                </a:highlight>
-              </a:rPr>
-              <a:t>інструмент</a:t>
-            </a:r>
-            <a:r>
-              <a:rPr lang="ru-RU" dirty="0" smtClean="0">
-                <a:solidFill>
-                  <a:srgbClr val="0D0D0D"/>
-                </a:solidFill>
-                <a:highlight>
-                  <a:srgbClr val="FFFFFF"/>
-                </a:highlight>
-              </a:rPr>
-              <a:t> </a:t>
-            </a:r>
-            <a:r>
-              <a:rPr lang="ru-RU" dirty="0" err="1">
-                <a:solidFill>
-                  <a:srgbClr val="0D0D0D"/>
-                </a:solidFill>
-                <a:highlight>
-                  <a:srgbClr val="FFFFFF"/>
-                </a:highlight>
-              </a:rPr>
-              <a:t>роботи</a:t>
-            </a:r>
-            <a:r>
-              <a:rPr lang="ru-RU" dirty="0">
-                <a:solidFill>
-                  <a:srgbClr val="0D0D0D"/>
-                </a:solidFill>
-                <a:highlight>
-                  <a:srgbClr val="FFFFFF"/>
-                </a:highlight>
-              </a:rPr>
-              <a:t> для </a:t>
-            </a:r>
-            <a:r>
-              <a:rPr lang="ru-RU" dirty="0" err="1">
-                <a:solidFill>
-                  <a:srgbClr val="0D0D0D"/>
-                </a:solidFill>
-                <a:highlight>
-                  <a:srgbClr val="FFFFFF"/>
-                </a:highlight>
-              </a:rPr>
-              <a:t>адміністрації</a:t>
-            </a:r>
-            <a:r>
-              <a:rPr lang="ru-RU" dirty="0">
-                <a:solidFill>
-                  <a:srgbClr val="0D0D0D"/>
-                </a:solidFill>
-                <a:highlight>
-                  <a:srgbClr val="FFFFFF"/>
-                </a:highlight>
-              </a:rPr>
-              <a:t> та </a:t>
-            </a:r>
-            <a:r>
-              <a:rPr lang="ru-RU" dirty="0" err="1">
-                <a:solidFill>
-                  <a:srgbClr val="0D0D0D"/>
-                </a:solidFill>
-                <a:highlight>
-                  <a:srgbClr val="FFFFFF"/>
-                </a:highlight>
-              </a:rPr>
-              <a:t>викладачів</a:t>
-            </a:r>
-            <a:r>
-              <a:rPr lang="ru-RU" dirty="0">
-                <a:solidFill>
-                  <a:srgbClr val="0D0D0D"/>
-                </a:solidFill>
-                <a:highlight>
-                  <a:srgbClr val="FFFFFF"/>
-                </a:highlight>
-              </a:rPr>
-              <a:t> центру, </a:t>
-            </a:r>
-            <a:r>
-              <a:rPr lang="ru-RU" dirty="0" err="1" smtClean="0">
-                <a:solidFill>
-                  <a:srgbClr val="0D0D0D"/>
-                </a:solidFill>
-                <a:highlight>
-                  <a:srgbClr val="FFFFFF"/>
-                </a:highlight>
-              </a:rPr>
-              <a:t>забезпечує</a:t>
-            </a:r>
-            <a:r>
-              <a:rPr lang="ru-RU" dirty="0" smtClean="0">
-                <a:solidFill>
-                  <a:srgbClr val="0D0D0D"/>
-                </a:solidFill>
-                <a:highlight>
-                  <a:srgbClr val="FFFFFF"/>
-                </a:highlight>
-              </a:rPr>
-              <a:t> доступ </a:t>
-            </a:r>
-            <a:r>
-              <a:rPr lang="ru-RU" dirty="0">
-                <a:solidFill>
-                  <a:srgbClr val="0D0D0D"/>
-                </a:solidFill>
-                <a:highlight>
-                  <a:srgbClr val="FFFFFF"/>
-                </a:highlight>
-              </a:rPr>
-              <a:t>до </a:t>
-            </a:r>
-            <a:r>
-              <a:rPr lang="ru-RU" dirty="0" err="1">
-                <a:solidFill>
-                  <a:srgbClr val="0D0D0D"/>
-                </a:solidFill>
-                <a:highlight>
-                  <a:srgbClr val="FFFFFF"/>
-                </a:highlight>
-              </a:rPr>
-              <a:t>всього</a:t>
-            </a:r>
-            <a:r>
-              <a:rPr lang="ru-RU" dirty="0">
-                <a:solidFill>
-                  <a:srgbClr val="0D0D0D"/>
-                </a:solidFill>
-                <a:highlight>
-                  <a:srgbClr val="FFFFFF"/>
-                </a:highlight>
-              </a:rPr>
-              <a:t> </a:t>
-            </a:r>
-            <a:r>
-              <a:rPr lang="ru-RU" dirty="0" err="1">
-                <a:solidFill>
-                  <a:srgbClr val="0D0D0D"/>
-                </a:solidFill>
-                <a:highlight>
-                  <a:srgbClr val="FFFFFF"/>
-                </a:highlight>
-              </a:rPr>
-              <a:t>функціоналу</a:t>
-            </a:r>
-            <a:r>
-              <a:rPr lang="ru-RU" dirty="0">
-                <a:solidFill>
-                  <a:srgbClr val="0D0D0D"/>
-                </a:solidFill>
-                <a:highlight>
-                  <a:srgbClr val="FFFFFF"/>
-                </a:highlight>
-              </a:rPr>
-              <a:t> </a:t>
-            </a:r>
-            <a:r>
-              <a:rPr lang="ru-RU" dirty="0" err="1" smtClean="0">
-                <a:solidFill>
-                  <a:srgbClr val="0D0D0D"/>
-                </a:solidFill>
-                <a:highlight>
-                  <a:srgbClr val="FFFFFF"/>
-                </a:highlight>
-              </a:rPr>
-              <a:t>системи</a:t>
-            </a:r>
-            <a:r>
-              <a:rPr lang="ru-RU" dirty="0" smtClean="0">
-                <a:solidFill>
-                  <a:srgbClr val="0D0D0D"/>
-                </a:solidFill>
-                <a:highlight>
-                  <a:srgbClr val="FFFFFF"/>
-                </a:highlight>
-              </a:rPr>
-              <a:t>. </a:t>
-            </a:r>
-          </a:p>
-          <a:p>
-            <a:pPr marL="0" lvl="0" indent="0" algn="just">
-              <a:spcBef>
-                <a:spcPts val="1500"/>
-              </a:spcBef>
-              <a:buNone/>
-            </a:pPr>
-            <a:r>
-              <a:rPr lang="ru-RU" dirty="0" err="1" smtClean="0">
-                <a:solidFill>
-                  <a:srgbClr val="0D0D0D"/>
-                </a:solidFill>
-                <a:highlight>
-                  <a:srgbClr val="FFFFFF"/>
-                </a:highlight>
-              </a:rPr>
-              <a:t>Мобільний</a:t>
-            </a:r>
-            <a:r>
-              <a:rPr lang="ru-RU" dirty="0" smtClean="0">
-                <a:solidFill>
-                  <a:srgbClr val="0D0D0D"/>
-                </a:solidFill>
-                <a:highlight>
-                  <a:srgbClr val="FFFFFF"/>
-                </a:highlight>
-              </a:rPr>
-              <a:t> </a:t>
-            </a:r>
-            <a:r>
-              <a:rPr lang="ru-RU" dirty="0" err="1" smtClean="0">
-                <a:solidFill>
-                  <a:srgbClr val="0D0D0D"/>
-                </a:solidFill>
-                <a:highlight>
-                  <a:srgbClr val="FFFFFF"/>
-                </a:highlight>
-              </a:rPr>
-              <a:t>застосунок</a:t>
-            </a:r>
-            <a:r>
-              <a:rPr lang="ru-RU" dirty="0" smtClean="0">
-                <a:solidFill>
-                  <a:srgbClr val="0D0D0D"/>
-                </a:solidFill>
-                <a:highlight>
-                  <a:srgbClr val="FFFFFF"/>
-                </a:highlight>
-              </a:rPr>
-              <a:t> </a:t>
-            </a:r>
-            <a:r>
-              <a:rPr lang="ru-RU" dirty="0" err="1">
-                <a:solidFill>
-                  <a:srgbClr val="0D0D0D"/>
-                </a:solidFill>
-                <a:highlight>
-                  <a:srgbClr val="FFFFFF"/>
-                </a:highlight>
-              </a:rPr>
-              <a:t>орієнтований</a:t>
-            </a:r>
-            <a:r>
-              <a:rPr lang="ru-RU" dirty="0">
-                <a:solidFill>
-                  <a:srgbClr val="0D0D0D"/>
-                </a:solidFill>
-                <a:highlight>
-                  <a:srgbClr val="FFFFFF"/>
-                </a:highlight>
-              </a:rPr>
-              <a:t> </a:t>
-            </a:r>
-            <a:r>
-              <a:rPr lang="ru-RU" dirty="0" err="1">
-                <a:solidFill>
-                  <a:srgbClr val="0D0D0D"/>
-                </a:solidFill>
-                <a:highlight>
-                  <a:srgbClr val="FFFFFF"/>
-                </a:highlight>
-              </a:rPr>
-              <a:t>переважно</a:t>
-            </a:r>
-            <a:r>
-              <a:rPr lang="ru-RU" dirty="0">
-                <a:solidFill>
-                  <a:srgbClr val="0D0D0D"/>
-                </a:solidFill>
-                <a:highlight>
-                  <a:srgbClr val="FFFFFF"/>
-                </a:highlight>
-              </a:rPr>
-              <a:t> на </a:t>
-            </a:r>
-            <a:r>
-              <a:rPr lang="ru-RU" dirty="0" err="1">
-                <a:solidFill>
-                  <a:srgbClr val="0D0D0D"/>
-                </a:solidFill>
-                <a:highlight>
-                  <a:srgbClr val="FFFFFF"/>
-                </a:highlight>
-              </a:rPr>
-              <a:t>батьків</a:t>
-            </a:r>
-            <a:r>
-              <a:rPr lang="ru-RU" dirty="0">
-                <a:solidFill>
-                  <a:srgbClr val="0D0D0D"/>
-                </a:solidFill>
-                <a:highlight>
-                  <a:srgbClr val="FFFFFF"/>
-                </a:highlight>
-              </a:rPr>
-              <a:t> та </a:t>
-            </a:r>
-            <a:r>
-              <a:rPr lang="ru-RU" dirty="0" err="1" smtClean="0">
-                <a:solidFill>
-                  <a:srgbClr val="0D0D0D"/>
-                </a:solidFill>
-                <a:highlight>
-                  <a:srgbClr val="FFFFFF"/>
-                </a:highlight>
-              </a:rPr>
-              <a:t>має</a:t>
-            </a:r>
-            <a:r>
-              <a:rPr lang="ru-RU" dirty="0" smtClean="0">
-                <a:solidFill>
-                  <a:srgbClr val="0D0D0D"/>
-                </a:solidFill>
-                <a:highlight>
-                  <a:srgbClr val="FFFFFF"/>
-                </a:highlight>
-              </a:rPr>
-              <a:t> </a:t>
-            </a:r>
-            <a:r>
-              <a:rPr lang="ru-RU" dirty="0" err="1" smtClean="0">
-                <a:solidFill>
-                  <a:srgbClr val="0D0D0D"/>
-                </a:solidFill>
-                <a:highlight>
-                  <a:srgbClr val="FFFFFF"/>
-                </a:highlight>
-              </a:rPr>
-              <a:t>надавати</a:t>
-            </a:r>
-            <a:r>
-              <a:rPr lang="ru-RU" dirty="0" smtClean="0">
-                <a:solidFill>
-                  <a:srgbClr val="0D0D0D"/>
-                </a:solidFill>
-                <a:highlight>
-                  <a:srgbClr val="FFFFFF"/>
-                </a:highlight>
-              </a:rPr>
-              <a:t> </a:t>
-            </a:r>
-            <a:r>
-              <a:rPr lang="ru-RU" dirty="0" err="1">
-                <a:solidFill>
-                  <a:srgbClr val="0D0D0D"/>
-                </a:solidFill>
-                <a:highlight>
-                  <a:srgbClr val="FFFFFF"/>
-                </a:highlight>
-              </a:rPr>
-              <a:t>швидкий</a:t>
-            </a:r>
-            <a:r>
-              <a:rPr lang="ru-RU" dirty="0">
-                <a:solidFill>
-                  <a:srgbClr val="0D0D0D"/>
-                </a:solidFill>
-                <a:highlight>
-                  <a:srgbClr val="FFFFFF"/>
-                </a:highlight>
-              </a:rPr>
-              <a:t> і </a:t>
-            </a:r>
-            <a:r>
-              <a:rPr lang="ru-RU" dirty="0" err="1" smtClean="0">
-                <a:solidFill>
-                  <a:srgbClr val="0D0D0D"/>
-                </a:solidFill>
-                <a:highlight>
-                  <a:srgbClr val="FFFFFF"/>
-                </a:highlight>
-              </a:rPr>
-              <a:t>зручний</a:t>
-            </a:r>
-            <a:r>
-              <a:rPr lang="ru-RU" dirty="0" smtClean="0">
-                <a:solidFill>
-                  <a:srgbClr val="0D0D0D"/>
-                </a:solidFill>
-                <a:highlight>
-                  <a:srgbClr val="FFFFFF"/>
-                </a:highlight>
-              </a:rPr>
-              <a:t> доступ </a:t>
-            </a:r>
-            <a:r>
-              <a:rPr lang="ru-RU" dirty="0">
-                <a:solidFill>
-                  <a:srgbClr val="0D0D0D"/>
-                </a:solidFill>
-                <a:highlight>
-                  <a:srgbClr val="FFFFFF"/>
-                </a:highlight>
-              </a:rPr>
-              <a:t>до </a:t>
-            </a:r>
-            <a:r>
-              <a:rPr lang="ru-RU" dirty="0" err="1">
-                <a:solidFill>
-                  <a:srgbClr val="0D0D0D"/>
-                </a:solidFill>
-                <a:highlight>
-                  <a:srgbClr val="FFFFFF"/>
-                </a:highlight>
-              </a:rPr>
-              <a:t>розкладу</a:t>
-            </a:r>
-            <a:r>
-              <a:rPr lang="ru-RU" dirty="0">
-                <a:solidFill>
-                  <a:srgbClr val="0D0D0D"/>
-                </a:solidFill>
-                <a:highlight>
-                  <a:srgbClr val="FFFFFF"/>
-                </a:highlight>
-              </a:rPr>
-              <a:t> занять та </a:t>
-            </a:r>
-            <a:r>
-              <a:rPr lang="ru-RU" dirty="0" err="1">
-                <a:solidFill>
-                  <a:srgbClr val="0D0D0D"/>
-                </a:solidFill>
-                <a:highlight>
-                  <a:srgbClr val="FFFFFF"/>
-                </a:highlight>
-              </a:rPr>
-              <a:t>обміну</a:t>
-            </a:r>
-            <a:r>
-              <a:rPr lang="ru-RU" dirty="0">
-                <a:solidFill>
-                  <a:srgbClr val="0D0D0D"/>
-                </a:solidFill>
-                <a:highlight>
-                  <a:srgbClr val="FFFFFF"/>
-                </a:highlight>
-              </a:rPr>
-              <a:t> </a:t>
-            </a:r>
-            <a:r>
-              <a:rPr lang="ru-RU" dirty="0" err="1">
-                <a:solidFill>
-                  <a:srgbClr val="0D0D0D"/>
-                </a:solidFill>
-                <a:highlight>
-                  <a:srgbClr val="FFFFFF"/>
-                </a:highlight>
-              </a:rPr>
-              <a:t>повідомленнями</a:t>
-            </a:r>
-            <a:r>
-              <a:rPr lang="ru-RU" dirty="0">
-                <a:solidFill>
-                  <a:srgbClr val="0D0D0D"/>
-                </a:solidFill>
-                <a:highlight>
-                  <a:srgbClr val="FFFFFF"/>
-                </a:highlight>
-              </a:rPr>
-              <a:t> в </a:t>
-            </a:r>
-            <a:r>
-              <a:rPr lang="ru-RU" dirty="0" err="1" smtClean="0">
-                <a:solidFill>
-                  <a:srgbClr val="0D0D0D"/>
-                </a:solidFill>
-                <a:highlight>
-                  <a:srgbClr val="FFFFFF"/>
-                </a:highlight>
-              </a:rPr>
-              <a:t>чаті</a:t>
-            </a:r>
-            <a:r>
-              <a:rPr lang="ru-RU" dirty="0" smtClean="0">
-                <a:solidFill>
-                  <a:srgbClr val="0D0D0D"/>
-                </a:solidFill>
-                <a:highlight>
-                  <a:srgbClr val="FFFFFF"/>
-                </a:highlight>
-              </a:rPr>
-              <a:t>.</a:t>
-            </a:r>
-          </a:p>
-          <a:p>
-            <a:pPr marL="0" lvl="0" indent="0" algn="just">
-              <a:spcBef>
-                <a:spcPts val="1500"/>
-              </a:spcBef>
-              <a:buNone/>
-            </a:pPr>
-            <a:r>
-              <a:rPr lang="uk-UA" dirty="0" smtClean="0">
-                <a:solidFill>
-                  <a:srgbClr val="0D0D0D"/>
-                </a:solidFill>
-                <a:highlight>
-                  <a:srgbClr val="FFFFFF"/>
-                </a:highlight>
-              </a:rPr>
-              <a:t>Завданням даної роботи є створення </a:t>
-            </a:r>
-            <a:r>
-              <a:rPr lang="en-US" dirty="0" smtClean="0">
-                <a:solidFill>
-                  <a:srgbClr val="0D0D0D"/>
-                </a:solidFill>
-                <a:highlight>
-                  <a:srgbClr val="FFFFFF"/>
-                </a:highlight>
-              </a:rPr>
-              <a:t>front-end </a:t>
-            </a:r>
-            <a:r>
-              <a:rPr lang="uk-UA" dirty="0" smtClean="0">
-                <a:solidFill>
-                  <a:srgbClr val="0D0D0D"/>
-                </a:solidFill>
-                <a:highlight>
-                  <a:srgbClr val="FFFFFF"/>
-                </a:highlight>
-              </a:rPr>
-              <a:t>частини </a:t>
-            </a:r>
-            <a:r>
-              <a:rPr lang="uk-UA" dirty="0" err="1" smtClean="0">
-                <a:solidFill>
-                  <a:srgbClr val="0D0D0D"/>
-                </a:solidFill>
-                <a:highlight>
-                  <a:srgbClr val="FFFFFF"/>
-                </a:highlight>
-              </a:rPr>
-              <a:t>вебсайту</a:t>
-            </a:r>
-            <a:r>
-              <a:rPr lang="uk-UA" dirty="0" smtClean="0">
-                <a:solidFill>
-                  <a:srgbClr val="0D0D0D"/>
-                </a:solidFill>
-                <a:highlight>
-                  <a:srgbClr val="FFFFFF"/>
-                </a:highlight>
-              </a:rPr>
-              <a:t> та функціоналу чату для мобільного застосунку під ОС </a:t>
-            </a:r>
-            <a:r>
-              <a:rPr lang="en-US" dirty="0" smtClean="0">
-                <a:solidFill>
-                  <a:srgbClr val="0D0D0D"/>
-                </a:solidFill>
-                <a:highlight>
-                  <a:srgbClr val="FFFFFF"/>
-                </a:highlight>
-              </a:rPr>
-              <a:t>Android.</a:t>
-            </a:r>
-            <a:endParaRPr lang="uk-UA" dirty="0" smtClean="0">
+            <a:endParaRPr lang="en-US" dirty="0" smtClean="0">
               <a:solidFill>
                 <a:srgbClr val="0D0D0D"/>
               </a:solidFill>
@@ -13338,6 +12639,561 @@
                 <a:srgbClr val="FFFFFF"/>
               </a:highlight>
             </a:endParaRPr>
+          </a:p>
+          <a:p>
+            <a:pPr marL="0" lvl="0" indent="0" algn="just">
+              <a:spcBef>
+                <a:spcPts val="1500"/>
+              </a:spcBef>
+              <a:buNone/>
+            </a:pPr>
+            <a:r>
+              <a:rPr lang="ru-RU" dirty="0" smtClean="0">
+                <a:solidFill>
+                  <a:srgbClr val="0D0D0D"/>
+                </a:solidFill>
+                <a:highlight>
+                  <a:srgbClr val="FFFFFF"/>
+                </a:highlight>
+              </a:rPr>
+              <a:t>Вебсайт </a:t>
+            </a:r>
+            <a:r>
+              <a:rPr lang="ru-RU" dirty="0" smtClean="0">
+                <a:solidFill>
+                  <a:srgbClr val="0D0D0D"/>
+                </a:solidFill>
+                <a:highlight>
+                  <a:srgbClr val="FFFFFF"/>
+                </a:highlight>
+              </a:rPr>
+              <a:t>– </a:t>
+            </a:r>
+            <a:r>
+              <a:rPr lang="ru-RU" dirty="0" err="1" smtClean="0">
+                <a:solidFill>
+                  <a:srgbClr val="0D0D0D"/>
+                </a:solidFill>
+                <a:highlight>
+                  <a:srgbClr val="FFFFFF"/>
+                </a:highlight>
+              </a:rPr>
+              <a:t>основний</a:t>
+            </a:r>
+            <a:r>
+              <a:rPr lang="ru-RU" dirty="0" smtClean="0">
+                <a:solidFill>
+                  <a:srgbClr val="0D0D0D"/>
+                </a:solidFill>
+                <a:highlight>
+                  <a:srgbClr val="FFFFFF"/>
+                </a:highlight>
+              </a:rPr>
+              <a:t> </a:t>
+            </a:r>
+            <a:r>
+              <a:rPr lang="ru-RU" dirty="0" err="1" smtClean="0">
+                <a:solidFill>
+                  <a:srgbClr val="0D0D0D"/>
+                </a:solidFill>
+                <a:highlight>
+                  <a:srgbClr val="FFFFFF"/>
+                </a:highlight>
+              </a:rPr>
+              <a:t>інструмент</a:t>
+            </a:r>
+            <a:r>
+              <a:rPr lang="ru-RU" dirty="0" smtClean="0">
+                <a:solidFill>
+                  <a:srgbClr val="0D0D0D"/>
+                </a:solidFill>
+                <a:highlight>
+                  <a:srgbClr val="FFFFFF"/>
+                </a:highlight>
+              </a:rPr>
+              <a:t> </a:t>
+            </a:r>
+            <a:r>
+              <a:rPr lang="ru-RU" dirty="0" err="1">
+                <a:solidFill>
+                  <a:srgbClr val="0D0D0D"/>
+                </a:solidFill>
+                <a:highlight>
+                  <a:srgbClr val="FFFFFF"/>
+                </a:highlight>
+              </a:rPr>
+              <a:t>роботи</a:t>
+            </a:r>
+            <a:r>
+              <a:rPr lang="ru-RU" dirty="0">
+                <a:solidFill>
+                  <a:srgbClr val="0D0D0D"/>
+                </a:solidFill>
+                <a:highlight>
+                  <a:srgbClr val="FFFFFF"/>
+                </a:highlight>
+              </a:rPr>
+              <a:t> для </a:t>
+            </a:r>
+            <a:r>
+              <a:rPr lang="ru-RU" i="1" dirty="0" err="1">
+                <a:solidFill>
+                  <a:srgbClr val="0D0D0D"/>
+                </a:solidFill>
+                <a:highlight>
+                  <a:srgbClr val="FFFFFF"/>
+                </a:highlight>
+              </a:rPr>
+              <a:t>адміністрації</a:t>
+            </a:r>
+            <a:r>
+              <a:rPr lang="ru-RU" dirty="0">
+                <a:solidFill>
+                  <a:srgbClr val="0D0D0D"/>
+                </a:solidFill>
+                <a:highlight>
+                  <a:srgbClr val="FFFFFF"/>
+                </a:highlight>
+              </a:rPr>
+              <a:t> та </a:t>
+            </a:r>
+            <a:r>
+              <a:rPr lang="ru-RU" i="1" dirty="0" err="1">
+                <a:solidFill>
+                  <a:srgbClr val="0D0D0D"/>
+                </a:solidFill>
+                <a:highlight>
+                  <a:srgbClr val="FFFFFF"/>
+                </a:highlight>
+              </a:rPr>
+              <a:t>викладачів</a:t>
+            </a:r>
+            <a:r>
+              <a:rPr lang="ru-RU" i="1" dirty="0">
+                <a:solidFill>
+                  <a:srgbClr val="0D0D0D"/>
+                </a:solidFill>
+                <a:highlight>
+                  <a:srgbClr val="FFFFFF"/>
+                </a:highlight>
+              </a:rPr>
+              <a:t> </a:t>
+            </a:r>
+            <a:r>
+              <a:rPr lang="ru-RU" dirty="0">
+                <a:solidFill>
+                  <a:srgbClr val="0D0D0D"/>
+                </a:solidFill>
+                <a:highlight>
+                  <a:srgbClr val="FFFFFF"/>
+                </a:highlight>
+              </a:rPr>
+              <a:t>центру, </a:t>
+            </a:r>
+            <a:r>
+              <a:rPr lang="ru-RU" dirty="0" err="1" smtClean="0">
+                <a:solidFill>
+                  <a:srgbClr val="0D0D0D"/>
+                </a:solidFill>
+                <a:highlight>
+                  <a:srgbClr val="FFFFFF"/>
+                </a:highlight>
+              </a:rPr>
+              <a:t>забезпечує</a:t>
+            </a:r>
+            <a:r>
+              <a:rPr lang="ru-RU" dirty="0" smtClean="0">
+                <a:solidFill>
+                  <a:srgbClr val="0D0D0D"/>
+                </a:solidFill>
+                <a:highlight>
+                  <a:srgbClr val="FFFFFF"/>
+                </a:highlight>
+              </a:rPr>
+              <a:t> доступ </a:t>
+            </a:r>
+            <a:r>
+              <a:rPr lang="ru-RU" dirty="0">
+                <a:solidFill>
+                  <a:srgbClr val="0D0D0D"/>
+                </a:solidFill>
+                <a:highlight>
+                  <a:srgbClr val="FFFFFF"/>
+                </a:highlight>
+              </a:rPr>
+              <a:t>до </a:t>
+            </a:r>
+            <a:r>
+              <a:rPr lang="ru-RU" dirty="0" err="1">
+                <a:solidFill>
+                  <a:srgbClr val="0D0D0D"/>
+                </a:solidFill>
+                <a:highlight>
+                  <a:srgbClr val="FFFFFF"/>
+                </a:highlight>
+              </a:rPr>
+              <a:t>всього</a:t>
+            </a:r>
+            <a:r>
+              <a:rPr lang="ru-RU" dirty="0">
+                <a:solidFill>
+                  <a:srgbClr val="0D0D0D"/>
+                </a:solidFill>
+                <a:highlight>
+                  <a:srgbClr val="FFFFFF"/>
+                </a:highlight>
+              </a:rPr>
+              <a:t> </a:t>
+            </a:r>
+            <a:r>
+              <a:rPr lang="ru-RU" dirty="0" err="1">
+                <a:solidFill>
+                  <a:srgbClr val="0D0D0D"/>
+                </a:solidFill>
+                <a:highlight>
+                  <a:srgbClr val="FFFFFF"/>
+                </a:highlight>
+              </a:rPr>
+              <a:t>функціоналу</a:t>
+            </a:r>
+            <a:r>
+              <a:rPr lang="ru-RU" dirty="0">
+                <a:solidFill>
+                  <a:srgbClr val="0D0D0D"/>
+                </a:solidFill>
+                <a:highlight>
+                  <a:srgbClr val="FFFFFF"/>
+                </a:highlight>
+              </a:rPr>
+              <a:t> </a:t>
+            </a:r>
+            <a:r>
+              <a:rPr lang="ru-RU" dirty="0" err="1" smtClean="0">
+                <a:solidFill>
+                  <a:srgbClr val="0D0D0D"/>
+                </a:solidFill>
+                <a:highlight>
+                  <a:srgbClr val="FFFFFF"/>
+                </a:highlight>
+              </a:rPr>
+              <a:t>системи</a:t>
+            </a:r>
+            <a:r>
+              <a:rPr lang="ru-RU" dirty="0" smtClean="0">
+                <a:solidFill>
+                  <a:srgbClr val="0D0D0D"/>
+                </a:solidFill>
+                <a:highlight>
+                  <a:srgbClr val="FFFFFF"/>
+                </a:highlight>
+              </a:rPr>
+              <a:t>. </a:t>
+            </a:r>
+          </a:p>
+          <a:p>
+            <a:pPr marL="0" lvl="0" indent="0" algn="just">
+              <a:spcBef>
+                <a:spcPts val="1500"/>
+              </a:spcBef>
+              <a:buNone/>
+            </a:pPr>
+            <a:r>
+              <a:rPr lang="ru-RU" dirty="0" err="1" smtClean="0">
+                <a:solidFill>
+                  <a:srgbClr val="0D0D0D"/>
+                </a:solidFill>
+                <a:highlight>
+                  <a:srgbClr val="FFFFFF"/>
+                </a:highlight>
+              </a:rPr>
+              <a:t>Мобільний</a:t>
+            </a:r>
+            <a:r>
+              <a:rPr lang="ru-RU" dirty="0" smtClean="0">
+                <a:solidFill>
+                  <a:srgbClr val="0D0D0D"/>
+                </a:solidFill>
+                <a:highlight>
+                  <a:srgbClr val="FFFFFF"/>
+                </a:highlight>
+              </a:rPr>
+              <a:t> </a:t>
+            </a:r>
+            <a:r>
+              <a:rPr lang="ru-RU" dirty="0" err="1" smtClean="0">
+                <a:solidFill>
+                  <a:srgbClr val="0D0D0D"/>
+                </a:solidFill>
+                <a:highlight>
+                  <a:srgbClr val="FFFFFF"/>
+                </a:highlight>
+              </a:rPr>
+              <a:t>застосунок</a:t>
+            </a:r>
+            <a:r>
+              <a:rPr lang="ru-RU" dirty="0" smtClean="0">
+                <a:solidFill>
+                  <a:srgbClr val="0D0D0D"/>
+                </a:solidFill>
+                <a:highlight>
+                  <a:srgbClr val="FFFFFF"/>
+                </a:highlight>
+              </a:rPr>
+              <a:t> </a:t>
+            </a:r>
+            <a:r>
+              <a:rPr lang="ru-RU" dirty="0" err="1">
+                <a:solidFill>
+                  <a:srgbClr val="0D0D0D"/>
+                </a:solidFill>
+                <a:highlight>
+                  <a:srgbClr val="FFFFFF"/>
+                </a:highlight>
+              </a:rPr>
+              <a:t>орієнтований</a:t>
+            </a:r>
+            <a:r>
+              <a:rPr lang="ru-RU" dirty="0">
+                <a:solidFill>
+                  <a:srgbClr val="0D0D0D"/>
+                </a:solidFill>
+                <a:highlight>
+                  <a:srgbClr val="FFFFFF"/>
+                </a:highlight>
+              </a:rPr>
+              <a:t> </a:t>
+            </a:r>
+            <a:r>
+              <a:rPr lang="ru-RU" dirty="0" err="1">
+                <a:solidFill>
+                  <a:srgbClr val="0D0D0D"/>
+                </a:solidFill>
+                <a:highlight>
+                  <a:srgbClr val="FFFFFF"/>
+                </a:highlight>
+              </a:rPr>
+              <a:t>переважно</a:t>
+            </a:r>
+            <a:r>
+              <a:rPr lang="ru-RU" dirty="0">
+                <a:solidFill>
+                  <a:srgbClr val="0D0D0D"/>
+                </a:solidFill>
+                <a:highlight>
+                  <a:srgbClr val="FFFFFF"/>
+                </a:highlight>
+              </a:rPr>
+              <a:t> на </a:t>
+            </a:r>
+            <a:r>
+              <a:rPr lang="ru-RU" i="1" dirty="0" err="1">
+                <a:solidFill>
+                  <a:srgbClr val="0D0D0D"/>
+                </a:solidFill>
+                <a:highlight>
+                  <a:srgbClr val="FFFFFF"/>
+                </a:highlight>
+              </a:rPr>
+              <a:t>батьків</a:t>
+            </a:r>
+            <a:r>
+              <a:rPr lang="ru-RU" dirty="0">
+                <a:solidFill>
+                  <a:srgbClr val="0D0D0D"/>
+                </a:solidFill>
+                <a:highlight>
+                  <a:srgbClr val="FFFFFF"/>
+                </a:highlight>
+              </a:rPr>
+              <a:t> та </a:t>
+            </a:r>
+            <a:r>
+              <a:rPr lang="ru-RU" dirty="0" err="1" smtClean="0">
+                <a:solidFill>
+                  <a:srgbClr val="0D0D0D"/>
+                </a:solidFill>
+                <a:highlight>
+                  <a:srgbClr val="FFFFFF"/>
+                </a:highlight>
+              </a:rPr>
+              <a:t>має</a:t>
+            </a:r>
+            <a:r>
+              <a:rPr lang="ru-RU" dirty="0" smtClean="0">
+                <a:solidFill>
+                  <a:srgbClr val="0D0D0D"/>
+                </a:solidFill>
+                <a:highlight>
+                  <a:srgbClr val="FFFFFF"/>
+                </a:highlight>
+              </a:rPr>
+              <a:t> </a:t>
+            </a:r>
+            <a:r>
+              <a:rPr lang="ru-RU" dirty="0" err="1" smtClean="0">
+                <a:solidFill>
+                  <a:srgbClr val="0D0D0D"/>
+                </a:solidFill>
+                <a:highlight>
+                  <a:srgbClr val="FFFFFF"/>
+                </a:highlight>
+              </a:rPr>
+              <a:t>надавати</a:t>
+            </a:r>
+            <a:r>
+              <a:rPr lang="ru-RU" dirty="0" smtClean="0">
+                <a:solidFill>
+                  <a:srgbClr val="0D0D0D"/>
+                </a:solidFill>
+                <a:highlight>
+                  <a:srgbClr val="FFFFFF"/>
+                </a:highlight>
+              </a:rPr>
+              <a:t> </a:t>
+            </a:r>
+            <a:r>
+              <a:rPr lang="ru-RU" dirty="0" err="1">
+                <a:solidFill>
+                  <a:srgbClr val="0D0D0D"/>
+                </a:solidFill>
+                <a:highlight>
+                  <a:srgbClr val="FFFFFF"/>
+                </a:highlight>
+              </a:rPr>
+              <a:t>швидкий</a:t>
+            </a:r>
+            <a:r>
+              <a:rPr lang="ru-RU" dirty="0">
+                <a:solidFill>
+                  <a:srgbClr val="0D0D0D"/>
+                </a:solidFill>
+                <a:highlight>
+                  <a:srgbClr val="FFFFFF"/>
+                </a:highlight>
+              </a:rPr>
+              <a:t> і </a:t>
+            </a:r>
+            <a:r>
+              <a:rPr lang="ru-RU" dirty="0" err="1" smtClean="0">
+                <a:solidFill>
+                  <a:srgbClr val="0D0D0D"/>
+                </a:solidFill>
+                <a:highlight>
+                  <a:srgbClr val="FFFFFF"/>
+                </a:highlight>
+              </a:rPr>
+              <a:t>зручний</a:t>
+            </a:r>
+            <a:r>
+              <a:rPr lang="ru-RU" dirty="0" smtClean="0">
+                <a:solidFill>
+                  <a:srgbClr val="0D0D0D"/>
+                </a:solidFill>
+                <a:highlight>
+                  <a:srgbClr val="FFFFFF"/>
+                </a:highlight>
+              </a:rPr>
+              <a:t> доступ </a:t>
+            </a:r>
+            <a:r>
+              <a:rPr lang="ru-RU" dirty="0">
+                <a:solidFill>
+                  <a:srgbClr val="0D0D0D"/>
+                </a:solidFill>
+                <a:highlight>
+                  <a:srgbClr val="FFFFFF"/>
+                </a:highlight>
+              </a:rPr>
+              <a:t>до </a:t>
+            </a:r>
+            <a:r>
+              <a:rPr lang="ru-RU" dirty="0" err="1">
+                <a:solidFill>
+                  <a:srgbClr val="0D0D0D"/>
+                </a:solidFill>
+                <a:highlight>
+                  <a:srgbClr val="FFFFFF"/>
+                </a:highlight>
+              </a:rPr>
+              <a:t>розкладу</a:t>
+            </a:r>
+            <a:r>
+              <a:rPr lang="ru-RU" dirty="0">
+                <a:solidFill>
+                  <a:srgbClr val="0D0D0D"/>
+                </a:solidFill>
+                <a:highlight>
+                  <a:srgbClr val="FFFFFF"/>
+                </a:highlight>
+              </a:rPr>
+              <a:t> занять та </a:t>
+            </a:r>
+            <a:r>
+              <a:rPr lang="ru-RU" dirty="0" err="1">
+                <a:solidFill>
+                  <a:srgbClr val="0D0D0D"/>
+                </a:solidFill>
+                <a:highlight>
+                  <a:srgbClr val="FFFFFF"/>
+                </a:highlight>
+              </a:rPr>
+              <a:t>обміну</a:t>
+            </a:r>
+            <a:r>
+              <a:rPr lang="ru-RU" dirty="0">
+                <a:solidFill>
+                  <a:srgbClr val="0D0D0D"/>
+                </a:solidFill>
+                <a:highlight>
+                  <a:srgbClr val="FFFFFF"/>
+                </a:highlight>
+              </a:rPr>
+              <a:t> </a:t>
+            </a:r>
+            <a:r>
+              <a:rPr lang="ru-RU" dirty="0" err="1">
+                <a:solidFill>
+                  <a:srgbClr val="0D0D0D"/>
+                </a:solidFill>
+                <a:highlight>
+                  <a:srgbClr val="FFFFFF"/>
+                </a:highlight>
+              </a:rPr>
+              <a:t>повідомленнями</a:t>
+            </a:r>
+            <a:r>
+              <a:rPr lang="ru-RU" dirty="0">
+                <a:solidFill>
+                  <a:srgbClr val="0D0D0D"/>
+                </a:solidFill>
+                <a:highlight>
+                  <a:srgbClr val="FFFFFF"/>
+                </a:highlight>
+              </a:rPr>
+              <a:t> в </a:t>
+            </a:r>
+            <a:r>
+              <a:rPr lang="ru-RU" dirty="0" err="1" smtClean="0">
+                <a:solidFill>
+                  <a:srgbClr val="0D0D0D"/>
+                </a:solidFill>
+                <a:highlight>
+                  <a:srgbClr val="FFFFFF"/>
+                </a:highlight>
+              </a:rPr>
+              <a:t>чаті</a:t>
+            </a:r>
+            <a:r>
+              <a:rPr lang="ru-RU" dirty="0" smtClean="0">
+                <a:solidFill>
+                  <a:srgbClr val="0D0D0D"/>
+                </a:solidFill>
+                <a:highlight>
+                  <a:srgbClr val="FFFFFF"/>
+                </a:highlight>
+              </a:rPr>
+              <a:t>.</a:t>
+            </a:r>
           </a:p>
         </p:txBody>
       </p:sp>
@@ -14590,6 +14446,29 @@
           <a:chExt cx="0" cy="0"/>
         </a:xfrm>
       </p:grpSpPr>
+      <p:pic>
+        <p:nvPicPr>
+          <p:cNvPr id="5" name="Рисунок 4"/>
+          <p:cNvPicPr>
+            <a:picLocks noChangeAspect="1"/>
+          </p:cNvPicPr>
+          <p:nvPr/>
+        </p:nvPicPr>
+        <p:blipFill rotWithShape="1">
+          <a:blip r:embed="rId3"/>
+          <a:srcRect l="1036" t="1203" r="1815"/>
+          <a:stretch/>
+        </p:blipFill>
+        <p:spPr>
+          <a:xfrm>
+            <a:off x="0" y="751428"/>
+            <a:ext cx="5585460" cy="4102511"/>
+          </a:xfrm>
+          <a:prstGeom prst="rect">
+            <a:avLst/>
+          </a:prstGeom>
+        </p:spPr>
+      </p:pic>
       <p:sp>
         <p:nvSpPr>
           <p:cNvPr id="99" name="Google Shape;99;p18"/>
@@ -14602,7 +14481,7 @@
         </p:nvSpPr>
         <p:spPr>
           <a:xfrm>
-            <a:off x="268925" y="349659"/>
+            <a:off x="257640" y="137008"/>
             <a:ext cx="8520600" cy="831300"/>
           </a:xfrm>
           <a:prstGeom prst="rect">
@@ -14636,34 +14515,6 @@
           </a:p>
         </p:txBody>
       </p:sp>
-      <p:pic>
-        <p:nvPicPr>
-          <p:cNvPr id="101" name="Google Shape;101;p18"/>
-          <p:cNvPicPr preferRelativeResize="0"/>
-          <p:nvPr/>
-        </p:nvPicPr>
-        <p:blipFill>
-          <a:blip r:embed="rId3">
-            <a:alphaModFix/>
-          </a:blip>
-          <a:stretch>
-            <a:fillRect/>
-          </a:stretch>
-        </p:blipFill>
-        <p:spPr>
-          <a:xfrm>
-            <a:off x="268925" y="4359500"/>
-            <a:ext cx="862250" cy="581750"/>
-          </a:xfrm>
-          <a:prstGeom prst="rect">
-            <a:avLst/>
-          </a:prstGeom>
-          <a:noFill/>
-          <a:ln>
-            <a:noFill/>
-          </a:ln>
-        </p:spPr>
-      </p:pic>
       <p:sp>
         <p:nvSpPr>
           <p:cNvPr id="2" name="TextBox 1">
@@ -14715,31 +14566,8 @@
         </p:blipFill>
         <p:spPr>
           <a:xfrm>
-            <a:off x="5344633" y="1602043"/>
-            <a:ext cx="3799367" cy="1531017"/>
-          </a:xfrm>
-          <a:prstGeom prst="rect">
-            <a:avLst/>
-          </a:prstGeom>
-        </p:spPr>
-      </p:pic>
-      <p:pic>
-        <p:nvPicPr>
-          <p:cNvPr id="5" name="Рисунок 4"/>
-          <p:cNvPicPr>
-            <a:picLocks noChangeAspect="1"/>
-          </p:cNvPicPr>
-          <p:nvPr/>
-        </p:nvPicPr>
-        <p:blipFill rotWithShape="1">
-          <a:blip r:embed="rId5"/>
-          <a:srcRect t="1203" r="1803"/>
-          <a:stretch/>
-        </p:blipFill>
-        <p:spPr>
-          <a:xfrm>
-            <a:off x="35442" y="1084519"/>
-            <a:ext cx="5309191" cy="3140521"/>
+            <a:off x="4785360" y="968308"/>
+            <a:ext cx="4276932" cy="1822635"/>
           </a:xfrm>
           <a:prstGeom prst="rect">
             <a:avLst/>
